--- a/dist/초5/국어/문학문법매체/초5_국어_문학문법매체_03_문장표현점검_학생용.pptx
+++ b/dist/초5/국어/문학문법매체/초5_국어_문학문법매체_03_문장표현점검_학생용.pptx
@@ -120,13 +120,13 @@
   <p:extLst>
     <p:ext uri="{521415D9-36F7-43E2-AB2F-B90AF26B5E84}">
       <p14:sectionLst xmlns:p14="http://schemas.microsoft.com/office/powerpoint/2010/main">
-        <p14:section name="도입" id="{18f288b4-0f03-96c0-680b-80d2bb10231d}">
+        <p14:section name="도입" id="{4185dd85-9cac-17cf-4848-50f3c3d846ae}">
           <p14:sldIdLst>
             <p14:sldId id="256"/>
             <p14:sldId id="257"/>
           </p14:sldIdLst>
         </p14:section>
-        <p14:section name="개념" id="{83545372-d375-31e9-5d51-2acc2732480a}">
+        <p14:section name="개념" id="{a4a98b35-6b8d-ae7b-1a9c-245cce7297f7}">
           <p14:sldIdLst>
             <p14:sldId id="258"/>
             <p14:sldId id="259"/>
@@ -135,25 +135,25 @@
             <p14:sldId id="262"/>
           </p14:sldIdLst>
         </p14:section>
-        <p14:section name="연습" id="{434051b6-73c0-319a-9129-0a7fcd70db97}">
+        <p14:section name="연습" id="{83b7894f-85b6-f5f8-7f07-4fc9c5f1a51f}">
           <p14:sldIdLst>
             <p14:sldId id="263"/>
             <p14:sldId id="264"/>
             <p14:sldId id="265"/>
           </p14:sldIdLst>
         </p14:section>
-        <p14:section name="확인" id="{90084852-6572-7df2-9f9a-23359ff33bef}">
+        <p14:section name="확인" id="{d1dda56d-e76a-5103-c26c-c5df4c8285d3}">
           <p14:sldIdLst>
             <p14:sldId id="266"/>
             <p14:sldId id="267"/>
           </p14:sldIdLst>
         </p14:section>
-        <p14:section name="정리" id="{f701af20-64d8-8349-c308-898aa070e41b}">
+        <p14:section name="정리" id="{18cfc38b-b381-6d58-ee60-b3fb8260f551}">
           <p14:sldIdLst>
             <p14:sldId id="268"/>
           </p14:sldIdLst>
         </p14:section>
-        <p14:section name="보충" id="{8f92cb13-1454-a3cf-41ca-be95da110e6b}">
+        <p14:section name="보충" id="{f979f5a7-1f38-6873-0f6e-cdce0a4b1564}">
           <p14:sldIdLst>
             <p14:sldId id="269"/>
           </p14:sldIdLst>
@@ -6948,7 +6948,7 @@
           </p:nvPr>
         </p:nvGraphicFramePr>
         <p:xfrm>
-          <a:off x="1065276" y="2461260"/>
+          <a:off x="1065276" y="2429256"/>
           <a:ext cx="10058400" cy="914400"/>
         </p:xfrm>
         <a:graphic>
@@ -6960,7 +6960,7 @@
                 <a:gridCol w="3621024"/>
                 <a:gridCol w="3621024"/>
               </a:tblGrid>
-              <a:tr h="472440">
+              <a:tr h="481584">
                 <a:tc>
                   <a:txBody>
                     <a:bodyPr/>
@@ -7166,7 +7166,7 @@
                   </a:tcPr>
                 </a:tc>
               </a:tr>
-              <a:tr h="472440">
+              <a:tr h="481584">
                 <a:tc>
                   <a:txBody>
                     <a:bodyPr/>
@@ -7372,7 +7372,7 @@
                   </a:tcPr>
                 </a:tc>
               </a:tr>
-              <a:tr h="472440">
+              <a:tr h="481584">
                 <a:tc>
                   <a:txBody>
                     <a:bodyPr/>
@@ -7578,7 +7578,7 @@
                   </a:tcPr>
                 </a:tc>
               </a:tr>
-              <a:tr h="472440">
+              <a:tr h="481584">
                 <a:tc>
                   <a:txBody>
                     <a:bodyPr/>
@@ -7784,7 +7784,7 @@
                   </a:tcPr>
                 </a:tc>
               </a:tr>
-              <a:tr h="472440">
+              <a:tr h="481584">
                 <a:tc>
                   <a:txBody>
                     <a:bodyPr/>
@@ -7990,7 +7990,7 @@
                   </a:tcPr>
                 </a:tc>
               </a:tr>
-              <a:tr h="472440">
+              <a:tr h="481584">
                 <a:tc>
                   <a:txBody>
                     <a:bodyPr/>
@@ -8196,7 +8196,7 @@
                   </a:tcPr>
                 </a:tc>
               </a:tr>
-              <a:tr h="472440">
+              <a:tr h="481584">
                 <a:tc>
                   <a:txBody>
                     <a:bodyPr/>
@@ -8604,7 +8604,7 @@
           </p:nvPr>
         </p:nvGraphicFramePr>
         <p:xfrm>
-          <a:off x="608076" y="2042160"/>
+          <a:off x="608076" y="2019300"/>
           <a:ext cx="10972800" cy="914400"/>
         </p:xfrm>
         <a:graphic>
@@ -8615,7 +8615,7 @@
                 <a:gridCol w="5266944"/>
                 <a:gridCol w="5705856"/>
               </a:tblGrid>
-              <a:tr h="472440">
+              <a:tr h="481584">
                 <a:tc>
                   <a:txBody>
                     <a:bodyPr/>
@@ -8753,7 +8753,7 @@
                   </a:tcPr>
                 </a:tc>
               </a:tr>
-              <a:tr h="472440">
+              <a:tr h="481584">
                 <a:tc>
                   <a:txBody>
                     <a:bodyPr/>
@@ -8891,7 +8891,7 @@
                   </a:tcPr>
                 </a:tc>
               </a:tr>
-              <a:tr h="472440">
+              <a:tr h="481584">
                 <a:tc>
                   <a:txBody>
                     <a:bodyPr/>
@@ -9029,7 +9029,7 @@
                   </a:tcPr>
                 </a:tc>
               </a:tr>
-              <a:tr h="472440">
+              <a:tr h="481584">
                 <a:tc>
                   <a:txBody>
                     <a:bodyPr/>
@@ -9167,7 +9167,7 @@
                   </a:tcPr>
                 </a:tc>
               </a:tr>
-              <a:tr h="472440">
+              <a:tr h="481584">
                 <a:tc>
                   <a:txBody>
                     <a:bodyPr/>
@@ -10116,7 +10116,7 @@
           </p:nvPr>
         </p:nvGraphicFramePr>
         <p:xfrm>
-          <a:off x="608076" y="2278380"/>
+          <a:off x="608076" y="2260092"/>
           <a:ext cx="10972800" cy="914400"/>
         </p:xfrm>
         <a:graphic>
@@ -10127,7 +10127,7 @@
                 <a:gridCol w="5486400"/>
                 <a:gridCol w="5486400"/>
               </a:tblGrid>
-              <a:tr h="472440">
+              <a:tr h="481584">
                 <a:tc>
                   <a:txBody>
                     <a:bodyPr/>
@@ -10265,7 +10265,7 @@
                   </a:tcPr>
                 </a:tc>
               </a:tr>
-              <a:tr h="472440">
+              <a:tr h="481584">
                 <a:tc>
                   <a:txBody>
                     <a:bodyPr/>
@@ -10403,7 +10403,7 @@
                   </a:tcPr>
                 </a:tc>
               </a:tr>
-              <a:tr h="472440">
+              <a:tr h="481584">
                 <a:tc>
                   <a:txBody>
                     <a:bodyPr/>
@@ -10541,7 +10541,7 @@
                   </a:tcPr>
                 </a:tc>
               </a:tr>
-              <a:tr h="472440">
+              <a:tr h="481584">
                 <a:tc>
                   <a:txBody>
                     <a:bodyPr/>
